--- a/m7/diapositivos/sessao-12-m7-f08.pptx
+++ b/m7/diapositivos/sessao-12-m7-f08.pptx
@@ -4088,6 +4088,20 @@
               <a:buNone/>
             </a:pPr>
             <a:r>
+              <a:rPr lang="en-US" sz="1200" i="1" dirty="0">
+                <a:solidFill>
+                  <a:srgbClr val="A9A79F"/>
+                </a:solidFill>
+                <a:latin typeface="Arial" pitchFamily="34" charset="0"/>
+                <a:ea typeface="Arial" pitchFamily="34" charset="-122"/>
+                <a:cs typeface="Arial" pitchFamily="34" charset="-120"/>
+              </a:rPr>
+              <a:t>Mensagem</a:t>
+            </a:r>
+            <a:pPr indent="0" marL="0">
+              <a:buNone/>
+            </a:pPr>
+            <a:r>
               <a:rPr lang="en-US" sz="1200" dirty="0">
                 <a:solidFill>
                   <a:srgbClr val="A9A79F"/>
@@ -4096,7 +4110,7 @@
                 <a:ea typeface="Arial" pitchFamily="34" charset="-122"/>
                 <a:cs typeface="Arial" pitchFamily="34" charset="-120"/>
               </a:rPr>
-              <a:t>Mensagem, II. Mar Português, I, Arquivo Pessoa</a:t>
+              <a:t>, II. «Mar Português», I, Arquivo Pessoa</a:t>
             </a:r>
             <a:endParaRPr lang="en-US" sz="1200" dirty="0"/>
           </a:p>
@@ -4468,6 +4482,20 @@
               <a:buNone/>
             </a:pPr>
             <a:r>
+              <a:rPr lang="en-US" sz="1200" i="1" dirty="0">
+                <a:solidFill>
+                  <a:srgbClr val="A9A79F"/>
+                </a:solidFill>
+                <a:latin typeface="Arial" pitchFamily="34" charset="0"/>
+                <a:ea typeface="Arial" pitchFamily="34" charset="-122"/>
+                <a:cs typeface="Arial" pitchFamily="34" charset="-120"/>
+              </a:rPr>
+              <a:t>Mensagem</a:t>
+            </a:r>
+            <a:pPr indent="0" marL="0">
+              <a:buNone/>
+            </a:pPr>
+            <a:r>
               <a:rPr lang="en-US" sz="1200" dirty="0">
                 <a:solidFill>
                   <a:srgbClr val="A9A79F"/>
@@ -4476,7 +4504,7 @@
                 <a:ea typeface="Arial" pitchFamily="34" charset="-122"/>
                 <a:cs typeface="Arial" pitchFamily="34" charset="-120"/>
               </a:rPr>
-              <a:t>Mensagem, II. Mar Português, I, Arquivo Pessoa</a:t>
+              <a:t>, II. «Mar Português», I, Arquivo Pessoa</a:t>
             </a:r>
             <a:endParaRPr lang="en-US" sz="1200" dirty="0"/>
           </a:p>
@@ -4888,6 +4916,20 @@
               <a:buNone/>
             </a:pPr>
             <a:r>
+              <a:rPr lang="en-US" sz="1200" i="1" dirty="0">
+                <a:solidFill>
+                  <a:srgbClr val="A9A79F"/>
+                </a:solidFill>
+                <a:latin typeface="Arial" pitchFamily="34" charset="0"/>
+                <a:ea typeface="Arial" pitchFamily="34" charset="-122"/>
+                <a:cs typeface="Arial" pitchFamily="34" charset="-120"/>
+              </a:rPr>
+              <a:t>Mensagem</a:t>
+            </a:r>
+            <a:pPr indent="0" marL="0">
+              <a:buNone/>
+            </a:pPr>
+            <a:r>
               <a:rPr lang="en-US" sz="1200" dirty="0">
                 <a:solidFill>
                   <a:srgbClr val="A9A79F"/>
@@ -4896,7 +4938,7 @@
                 <a:ea typeface="Arial" pitchFamily="34" charset="-122"/>
                 <a:cs typeface="Arial" pitchFamily="34" charset="-120"/>
               </a:rPr>
-              <a:t>Mensagem, II. Mar Português, X, Arquivo Pessoa</a:t>
+              <a:t>, II. «Mar Português», X, Arquivo Pessoa</a:t>
             </a:r>
             <a:endParaRPr lang="en-US" sz="1200" dirty="0"/>
           </a:p>
@@ -5308,6 +5350,20 @@
               <a:buNone/>
             </a:pPr>
             <a:r>
+              <a:rPr lang="en-US" sz="1200" i="1" dirty="0">
+                <a:solidFill>
+                  <a:srgbClr val="A9A79F"/>
+                </a:solidFill>
+                <a:latin typeface="Arial" pitchFamily="34" charset="0"/>
+                <a:ea typeface="Arial" pitchFamily="34" charset="-122"/>
+                <a:cs typeface="Arial" pitchFamily="34" charset="-120"/>
+              </a:rPr>
+              <a:t>Mensagem</a:t>
+            </a:r>
+            <a:pPr indent="0" marL="0">
+              <a:buNone/>
+            </a:pPr>
+            <a:r>
               <a:rPr lang="en-US" sz="1200" dirty="0">
                 <a:solidFill>
                   <a:srgbClr val="A9A79F"/>
@@ -5316,7 +5372,7 @@
                 <a:ea typeface="Arial" pitchFamily="34" charset="-122"/>
                 <a:cs typeface="Arial" pitchFamily="34" charset="-120"/>
               </a:rPr>
-              <a:t>Mensagem, II. Mar Português, X, Arquivo Pessoa</a:t>
+              <a:t>, II. «Mar Português», X, Arquivo Pessoa</a:t>
             </a:r>
             <a:endParaRPr lang="en-US" sz="1200" dirty="0"/>
           </a:p>
@@ -5715,6 +5771,23 @@
               <a:buNone/>
             </a:pPr>
             <a:r>
+              <a:rPr lang="en-US" sz="2400" i="1" dirty="0">
+                <a:solidFill>
+                  <a:srgbClr val="F2F0EA"/>
+                </a:solidFill>
+                <a:latin typeface="Arial" pitchFamily="34" charset="0"/>
+                <a:ea typeface="Arial" pitchFamily="34" charset="-122"/>
+                <a:cs typeface="Arial" pitchFamily="34" charset="-120"/>
+              </a:rPr>
+              <a:t>Mensagem</a:t>
+            </a:r>
+            <a:pPr indent="0" marL="0">
+              <a:lnSpc>
+                <a:spcPct val="105000"/>
+              </a:lnSpc>
+              <a:buNone/>
+            </a:pPr>
+            <a:r>
               <a:rPr lang="en-US" sz="2400" dirty="0">
                 <a:solidFill>
                   <a:srgbClr val="F2F0EA"/>
@@ -5723,7 +5796,7 @@
                 <a:ea typeface="Arial" pitchFamily="34" charset="-122"/>
                 <a:cs typeface="Arial" pitchFamily="34" charset="-120"/>
               </a:rPr>
-              <a:t>Mensagem (1934) reúne 44 poemas em três partes: Brasão, Mar Português e O Encoberto.</a:t>
+              <a:t> (1934) reúne 44 poemas em três partes: «Brasão», «Mar Português» e «O Encoberto».</a:t>
             </a:r>
             <a:endParaRPr lang="en-US" sz="2400" dirty="0"/>
           </a:p>
@@ -6251,7 +6324,7 @@
               <a:buNone/>
             </a:pPr>
             <a:r>
-              <a:rPr lang="en-US" sz="2300" dirty="0">
+              <a:rPr lang="en-US" sz="2300" i="1" dirty="0">
                 <a:solidFill>
                   <a:srgbClr val="F2F0EA"/>
                 </a:solidFill>
@@ -6259,7 +6332,24 @@
                 <a:ea typeface="Georgia" pitchFamily="34" charset="-122"/>
                 <a:cs typeface="Georgia" pitchFamily="34" charset="-120"/>
               </a:rPr>
-              <a:t>Mensagem abre com a epígrafe latina «Benedictus Dominus Deus noster qui dedit nobis signum» («Bendito o Senhor nosso Deus, que nos deu o sinal», tradução nossa). Gil Eanes dobrou o cabo Bojador, na costa africana, pela primeira vez em 1434.</a:t>
+              <a:t>Mensagem</a:t>
+            </a:r>
+            <a:pPr indent="0" marL="0">
+              <a:lnSpc>
+                <a:spcPct val="120000"/>
+              </a:lnSpc>
+              <a:buNone/>
+            </a:pPr>
+            <a:r>
+              <a:rPr lang="en-US" sz="2300" dirty="0">
+                <a:solidFill>
+                  <a:srgbClr val="F2F0EA"/>
+                </a:solidFill>
+                <a:latin typeface="Georgia" pitchFamily="34" charset="0"/>
+                <a:ea typeface="Georgia" pitchFamily="34" charset="-122"/>
+                <a:cs typeface="Georgia" pitchFamily="34" charset="-120"/>
+              </a:rPr>
+              <a:t> abre com a epígrafe latina «Benedictus Dominus Deus noster qui dedit nobis signum» («Bendito o Senhor nosso Deus, que nos deu o sinal», tradução nossa). Gil Eanes dobrou o cabo Bojador, na costa africana, pela primeira vez em 1434.</a:t>
             </a:r>
             <a:endParaRPr lang="en-US" sz="2300" dirty="0"/>
           </a:p>
